--- a/templates/decks/zh/nvidia-overview/template.pptx
+++ b/templates/decks/zh/nvidia-overview/template.pptx
@@ -26465,7 +26465,7 @@
                 <a:latin typeface="Consolas"/>
                 <a:ea typeface="Hiragino Sans GB"/>
               </a:rPr>
-              <a:t>Hopper · Blackwell · GB200 NVL72 · DGX · 网络</a:t>
+              <a:t>Hopper · Blackwell · GB200 · DGX · 网络</a:t>
             </a:r>
           </a:p>
         </p:txBody>
@@ -26768,7 +26768,7 @@
                 <a:latin typeface="Consolas"/>
                 <a:ea typeface="Hiragino Sans GB"/>
               </a:rPr>
-              <a:t>GeForce RTX 50 (Blackwell) · DLSS 4 · GeForce NOW</a:t>
+              <a:t>GeForce RTX 50 · DLSS 4 · GeForce NOW</a:t>
             </a:r>
           </a:p>
         </p:txBody>
